--- a/Наработки/диздоки/Непал/Непал.pptx
+++ b/Наработки/диздоки/Непал/Непал.pptx
@@ -209,7 +209,7 @@
             <a:fld id="{33E3D7F9-E251-484C-A6FF-FA958879DF69}" type="datetimeFigureOut">
               <a:rPr lang="ru-RU" smtClean="0"/>
               <a:pPr/>
-              <a:t>25.05.2023</a:t>
+              <a:t>30.07.2026</a:t>
             </a:fld>
             <a:endParaRPr lang="ru-RU"/>
           </a:p>
@@ -699,7 +699,7 @@
             <a:fld id="{85A5DE44-605B-4D3B-B2B7-94543DF81A36}" type="datetimeFigureOut">
               <a:rPr lang="ru-RU" smtClean="0"/>
               <a:pPr/>
-              <a:t>25.05.2023</a:t>
+              <a:t>30.07.2026</a:t>
             </a:fld>
             <a:endParaRPr lang="ru-RU"/>
           </a:p>
@@ -871,7 +871,7 @@
             <a:fld id="{85A5DE44-605B-4D3B-B2B7-94543DF81A36}" type="datetimeFigureOut">
               <a:rPr lang="ru-RU" smtClean="0"/>
               <a:pPr/>
-              <a:t>25.05.2023</a:t>
+              <a:t>30.07.2026</a:t>
             </a:fld>
             <a:endParaRPr lang="ru-RU"/>
           </a:p>
@@ -1053,7 +1053,7 @@
             <a:fld id="{85A5DE44-605B-4D3B-B2B7-94543DF81A36}" type="datetimeFigureOut">
               <a:rPr lang="ru-RU" smtClean="0"/>
               <a:pPr/>
-              <a:t>25.05.2023</a:t>
+              <a:t>30.07.2026</a:t>
             </a:fld>
             <a:endParaRPr lang="ru-RU"/>
           </a:p>
@@ -1225,7 +1225,7 @@
             <a:fld id="{85A5DE44-605B-4D3B-B2B7-94543DF81A36}" type="datetimeFigureOut">
               <a:rPr lang="ru-RU" smtClean="0"/>
               <a:pPr/>
-              <a:t>25.05.2023</a:t>
+              <a:t>30.07.2026</a:t>
             </a:fld>
             <a:endParaRPr lang="ru-RU"/>
           </a:p>
@@ -1473,7 +1473,7 @@
             <a:fld id="{85A5DE44-605B-4D3B-B2B7-94543DF81A36}" type="datetimeFigureOut">
               <a:rPr lang="ru-RU" smtClean="0"/>
               <a:pPr/>
-              <a:t>25.05.2023</a:t>
+              <a:t>30.07.2026</a:t>
             </a:fld>
             <a:endParaRPr lang="ru-RU"/>
           </a:p>
@@ -1707,7 +1707,7 @@
             <a:fld id="{85A5DE44-605B-4D3B-B2B7-94543DF81A36}" type="datetimeFigureOut">
               <a:rPr lang="ru-RU" smtClean="0"/>
               <a:pPr/>
-              <a:t>25.05.2023</a:t>
+              <a:t>30.07.2026</a:t>
             </a:fld>
             <a:endParaRPr lang="ru-RU"/>
           </a:p>
@@ -2076,7 +2076,7 @@
             <a:fld id="{85A5DE44-605B-4D3B-B2B7-94543DF81A36}" type="datetimeFigureOut">
               <a:rPr lang="ru-RU" smtClean="0"/>
               <a:pPr/>
-              <a:t>25.05.2023</a:t>
+              <a:t>30.07.2026</a:t>
             </a:fld>
             <a:endParaRPr lang="ru-RU"/>
           </a:p>
@@ -2196,7 +2196,7 @@
             <a:fld id="{85A5DE44-605B-4D3B-B2B7-94543DF81A36}" type="datetimeFigureOut">
               <a:rPr lang="ru-RU" smtClean="0"/>
               <a:pPr/>
-              <a:t>25.05.2023</a:t>
+              <a:t>30.07.2026</a:t>
             </a:fld>
             <a:endParaRPr lang="ru-RU"/>
           </a:p>
@@ -2293,7 +2293,7 @@
             <a:fld id="{85A5DE44-605B-4D3B-B2B7-94543DF81A36}" type="datetimeFigureOut">
               <a:rPr lang="ru-RU" smtClean="0"/>
               <a:pPr/>
-              <a:t>25.05.2023</a:t>
+              <a:t>30.07.2026</a:t>
             </a:fld>
             <a:endParaRPr lang="ru-RU"/>
           </a:p>
@@ -2572,7 +2572,7 @@
             <a:fld id="{85A5DE44-605B-4D3B-B2B7-94543DF81A36}" type="datetimeFigureOut">
               <a:rPr lang="ru-RU" smtClean="0"/>
               <a:pPr/>
-              <a:t>25.05.2023</a:t>
+              <a:t>30.07.2026</a:t>
             </a:fld>
             <a:endParaRPr lang="ru-RU"/>
           </a:p>
@@ -2831,7 +2831,7 @@
             <a:fld id="{85A5DE44-605B-4D3B-B2B7-94543DF81A36}" type="datetimeFigureOut">
               <a:rPr lang="ru-RU" smtClean="0"/>
               <a:pPr/>
-              <a:t>25.05.2023</a:t>
+              <a:t>30.07.2026</a:t>
             </a:fld>
             <a:endParaRPr lang="ru-RU"/>
           </a:p>
@@ -3046,7 +3046,7 @@
             <a:fld id="{85A5DE44-605B-4D3B-B2B7-94543DF81A36}" type="datetimeFigureOut">
               <a:rPr lang="ru-RU" smtClean="0"/>
               <a:pPr/>
-              <a:t>25.05.2023</a:t>
+              <a:t>30.07.2026</a:t>
             </a:fld>
             <a:endParaRPr lang="ru-RU"/>
           </a:p>
@@ -16141,6 +16141,53 @@
             <a:r>
               <a:rPr lang="ru-RU" sz="600" dirty="0"/>
               <a:t>).)</a:t>
+            </a:r>
+            <a:br>
+              <a:rPr lang="ru-RU" sz="600" dirty="0"/>
+            </a:br>
+            <a:r>
+              <a:rPr lang="ru-RU" sz="600" dirty="0"/>
+              <a:t>Малые «вассальные» королевства (как Мустанг)Когда центральное королевство </a:t>
+            </a:r>
+            <a:r>
+              <a:rPr lang="ru-RU" sz="600" dirty="0" err="1"/>
+              <a:t>Горкха</a:t>
+            </a:r>
+            <a:r>
+              <a:rPr lang="ru-RU" sz="600" dirty="0"/>
+              <a:t> объединяло Непал, некоторые княжества сдались добровольно на условиях автономии. Они платили налоги в Катманду, но сохраняли своих местных правителей (</a:t>
+            </a:r>
+            <a:r>
+              <a:rPr lang="ru-RU" sz="600" dirty="0" err="1"/>
+              <a:t>радж</a:t>
+            </a:r>
+            <a:r>
+              <a:rPr lang="ru-RU" sz="600" dirty="0"/>
+              <a:t>). Самыми известными из них </a:t>
+            </a:r>
+            <a:r>
+              <a:rPr lang="ru-RU" sz="600" dirty="0" err="1"/>
+              <a:t>были:Мустанг</a:t>
+            </a:r>
+            <a:r>
+              <a:rPr lang="ru-RU" sz="600" dirty="0"/>
+              <a:t> (Королевство Ло): Имело самый высокий уровень изоляции и тибетскую культуру. Королевский титул был упразднен только в 2008 </a:t>
+            </a:r>
+            <a:r>
+              <a:rPr lang="ru-RU" sz="600" dirty="0" err="1"/>
+              <a:t>году.Джаджаркот</a:t>
+            </a:r>
+            <a:r>
+              <a:rPr lang="ru-RU" sz="600" dirty="0"/>
+              <a:t>, Сальян и </a:t>
+            </a:r>
+            <a:r>
+              <a:rPr lang="ru-RU" sz="600" dirty="0" err="1"/>
+              <a:t>Баджханг</a:t>
+            </a:r>
+            <a:r>
+              <a:rPr lang="ru-RU" sz="600" dirty="0"/>
+              <a:t>: Их местные короли официально сохраняли свои номинальные титулы и внутренние привилегии вплоть до 1961 года, когда Непал окончательно ликвидировал систему вассальных княжеств.</a:t>
             </a:r>
             <a:endParaRPr lang="ru-RU" sz="1400" dirty="0"/>
           </a:p>
